--- a/tests/js/fixtures/sample.pptx
+++ b/tests/js/fixtures/sample.pptx
@@ -209,4 +209,13 @@
     <DisplayName>ZQX7731</DisplayName>
   </Owner>
 </p:properties>
+</file>
+
+<file path=customXml/itemProps1.xml><?xml version="1.0" encoding="utf-8"?>
+<ds:datastoreItem xmlns:ds="http://schemas.openxmlformats.org/officeDocument/2006/customXml" ds:itemID="{ZQX7731-0000-0000-0000-000000000001}">
+  <ds:schemaRefs>
+    <ds:schemaRef ds:uri="http://schemas.microsoft.com/office/2006/metadata/properties"/>
+    <ds:schemaRef ds:uri="ZQX7731-6b5d-4628-b7e0-5b86efa98958"/>
+  </ds:schemaRefs>
+</ds:datastoreItem>
 </file>
--- a/tests/js/fixtures/sample.pptx
+++ b/tests/js/fixtures/sample.pptx
@@ -218,4 +218,21 @@
     <ds:schemaRef ds:uri="ZQX7731-6b5d-4628-b7e0-5b86efa98958"/>
   </ds:schemaRefs>
 </ds:datastoreItem>
+</file>
+
+<file path=customXml/spItem.xml><?xml version="1.0" encoding="utf-8"?>
+<p:properties xmlns:p="urn:x">
+  <Owner>
+    <DisplayName>ZQX7731</DisplayName>
+  </Owner>
+</p:properties>
+</file>
+
+<file path=customXml/spProps.xml><?xml version="1.0" encoding="utf-8"?>
+<ds:datastoreItem xmlns:ds="http://schemas.openxmlformats.org/officeDocument/2006/customXml" ds:itemID="{ZQX7731-0000-0000-0000-000000000001}">
+  <ds:schemaRefs>
+    <ds:schemaRef ds:uri="http://schemas.microsoft.com/office/2006/metadata/properties"/>
+    <ds:schemaRef ds:uri="ZQX7731-6b5d-4628-b7e0-5b86efa98958"/>
+  </ds:schemaRefs>
+</ds:datastoreItem>
 </file>
--- a/tests/js/fixtures/sample.pptx
+++ b/tests/js/fixtures/sample.pptx
@@ -65,6 +65,10 @@
     <p:sldLayoutId id="2147483649" r:id="rId1"/>
   </p:sldLayoutIdLst>
 </p:sldMaster>
+</file>
+
+<file path=ppt/slideUpdateInfo/slideUpdateInfo1.xml><?xml version="1.0" encoding="utf-8"?>
+<p:sldSyncPr xmlns:p="http://schemas.openxmlformats.org/presentationml/2006/main" serverSldId="1" serverSldModifiedTime="2031-02-03T04:05:06Z" clientInsertedTime="2031-02-03T04:05:06Z"/>
 </file>
 
 <file path=ppt/slides/slide1.xml><?xml version="1.0" encoding="utf-8"?>
